--- a/curso/pptx/S65.pptx
+++ b/curso/pptx/S65.pptx
@@ -471,426 +471,6 @@
     </a:lvl9pPr>
   </p:notesStyle>
 </p:notesMaster>
-</file>
-
-<file path=ppt/notesSlides/notesSlide1.xml><?xml version="1.0" encoding="utf-8"?>
-<p:notes xmlns:a="http://schemas.openxmlformats.org/drawingml/2006/main" xmlns:p="http://schemas.openxmlformats.org/presentationml/2006/main" xmlns:r="http://schemas.openxmlformats.org/officeDocument/2006/relationships">
-  <p:cSld>
-    <p:spTree>
-      <p:nvGrpSpPr>
-        <p:cNvPr id="1" name=""/>
-        <p:cNvGrpSpPr/>
-        <p:nvPr/>
-      </p:nvGrpSpPr>
-      <p:grpSpPr>
-        <a:xfrm>
-          <a:off x="0" y="0"/>
-          <a:ext cx="0" cy="0"/>
-          <a:chOff x="0" y="0"/>
-          <a:chExt cx="0" cy="0"/>
-        </a:xfrm>
-      </p:grpSpPr>
-      <p:sp>
-        <p:nvSpPr>
-          <p:cNvPr id="2" name="Slide Image Placeholder 1"/>
-          <p:cNvSpPr>
-            <a:spLocks noGrp="1"/>
-          </p:cNvSpPr>
-          <p:nvPr>
-            <p:ph type="sldImg" idx="2"/>
-          </p:nvPr>
-        </p:nvSpPr>
-        <p:spPr/>
-      </p:sp>
-      <p:sp>
-        <p:nvSpPr>
-          <p:cNvPr id="3" name="Notes Placeholder 2"/>
-          <p:cNvSpPr>
-            <a:spLocks noGrp="1"/>
-          </p:cNvSpPr>
-          <p:nvPr>
-            <p:ph type="body" idx="3" sz="quarter"/>
-          </p:nvPr>
-        </p:nvSpPr>
-        <p:spPr/>
-        <p:txBody>
-          <a:bodyPr/>
-          <a:lstStyle/>
-          <a:p>
-            <a:r>
-              <a:t>3 minutos. Sin apuntes. Es para recordar, no cuenta para nota.</a:t>
-            </a:r>
-          </a:p>
-        </p:txBody>
-      </p:sp>
-      <p:sp>
-        <p:nvSpPr>
-          <p:cNvPr id="4" name="Slide Number Placeholder 3"/>
-          <p:cNvSpPr>
-            <a:spLocks noGrp="1"/>
-          </p:cNvSpPr>
-          <p:nvPr>
-            <p:ph type="sldNum" idx="5" sz="quarter"/>
-          </p:nvPr>
-        </p:nvSpPr>
-        <p:spPr/>
-      </p:sp>
-    </p:spTree>
-  </p:cSld>
-  <p:clrMapOvr>
-    <a:masterClrMapping/>
-  </p:clrMapOvr>
-</p:notes>
-</file>
-
-<file path=ppt/notesSlides/notesSlide2.xml><?xml version="1.0" encoding="utf-8"?>
-<p:notes xmlns:a="http://schemas.openxmlformats.org/drawingml/2006/main" xmlns:p="http://schemas.openxmlformats.org/presentationml/2006/main" xmlns:r="http://schemas.openxmlformats.org/officeDocument/2006/relationships">
-  <p:cSld>
-    <p:spTree>
-      <p:nvGrpSpPr>
-        <p:cNvPr id="1" name=""/>
-        <p:cNvGrpSpPr/>
-        <p:nvPr/>
-      </p:nvGrpSpPr>
-      <p:grpSpPr>
-        <a:xfrm>
-          <a:off x="0" y="0"/>
-          <a:ext cx="0" cy="0"/>
-          <a:chOff x="0" y="0"/>
-          <a:chExt cx="0" cy="0"/>
-        </a:xfrm>
-      </p:grpSpPr>
-      <p:sp>
-        <p:nvSpPr>
-          <p:cNvPr id="2" name="Slide Image Placeholder 1"/>
-          <p:cNvSpPr>
-            <a:spLocks noGrp="1"/>
-          </p:cNvSpPr>
-          <p:nvPr>
-            <p:ph type="sldImg" idx="2"/>
-          </p:nvPr>
-        </p:nvSpPr>
-        <p:spPr/>
-      </p:sp>
-      <p:sp>
-        <p:nvSpPr>
-          <p:cNvPr id="3" name="Notes Placeholder 2"/>
-          <p:cNvSpPr>
-            <a:spLocks noGrp="1"/>
-          </p:cNvSpPr>
-          <p:nvPr>
-            <p:ph type="body" idx="3" sz="quarter"/>
-          </p:nvPr>
-        </p:nvSpPr>
-        <p:spPr/>
-        <p:txBody>
-          <a:bodyPr/>
-          <a:lstStyle/>
-          <a:p>
-            <a:r>
-              <a:t>3 minutos. Sin apuntes. Es para recordar, no cuenta para nota.</a:t>
-            </a:r>
-          </a:p>
-        </p:txBody>
-      </p:sp>
-      <p:sp>
-        <p:nvSpPr>
-          <p:cNvPr id="4" name="Slide Number Placeholder 3"/>
-          <p:cNvSpPr>
-            <a:spLocks noGrp="1"/>
-          </p:cNvSpPr>
-          <p:nvPr>
-            <p:ph type="sldNum" idx="5" sz="quarter"/>
-          </p:nvPr>
-        </p:nvSpPr>
-        <p:spPr/>
-      </p:sp>
-    </p:spTree>
-  </p:cSld>
-  <p:clrMapOvr>
-    <a:masterClrMapping/>
-  </p:clrMapOvr>
-</p:notes>
-</file>
-
-<file path=ppt/notesSlides/notesSlide3.xml><?xml version="1.0" encoding="utf-8"?>
-<p:notes xmlns:a="http://schemas.openxmlformats.org/drawingml/2006/main" xmlns:p="http://schemas.openxmlformats.org/presentationml/2006/main" xmlns:r="http://schemas.openxmlformats.org/officeDocument/2006/relationships">
-  <p:cSld>
-    <p:spTree>
-      <p:nvGrpSpPr>
-        <p:cNvPr id="1" name=""/>
-        <p:cNvGrpSpPr/>
-        <p:nvPr/>
-      </p:nvGrpSpPr>
-      <p:grpSpPr>
-        <a:xfrm>
-          <a:off x="0" y="0"/>
-          <a:ext cx="0" cy="0"/>
-          <a:chOff x="0" y="0"/>
-          <a:chExt cx="0" cy="0"/>
-        </a:xfrm>
-      </p:grpSpPr>
-      <p:sp>
-        <p:nvSpPr>
-          <p:cNvPr id="2" name="Slide Image Placeholder 1"/>
-          <p:cNvSpPr>
-            <a:spLocks noGrp="1"/>
-          </p:cNvSpPr>
-          <p:nvPr>
-            <p:ph type="sldImg" idx="2"/>
-          </p:nvPr>
-        </p:nvSpPr>
-        <p:spPr/>
-      </p:sp>
-      <p:sp>
-        <p:nvSpPr>
-          <p:cNvPr id="3" name="Notes Placeholder 2"/>
-          <p:cNvSpPr>
-            <a:spLocks noGrp="1"/>
-          </p:cNvSpPr>
-          <p:nvPr>
-            <p:ph type="body" idx="3" sz="quarter"/>
-          </p:nvPr>
-        </p:nvSpPr>
-        <p:spPr/>
-        <p:txBody>
-          <a:bodyPr/>
-          <a:lstStyle/>
-          <a:p>
-            <a:r>
-              <a:t>Nadie tiene que contestar: solo pensarlo.</a:t>
-            </a:r>
-          </a:p>
-        </p:txBody>
-      </p:sp>
-      <p:sp>
-        <p:nvSpPr>
-          <p:cNvPr id="4" name="Slide Number Placeholder 3"/>
-          <p:cNvSpPr>
-            <a:spLocks noGrp="1"/>
-          </p:cNvSpPr>
-          <p:nvPr>
-            <p:ph type="sldNum" idx="5" sz="quarter"/>
-          </p:nvPr>
-        </p:nvSpPr>
-        <p:spPr/>
-      </p:sp>
-    </p:spTree>
-  </p:cSld>
-  <p:clrMapOvr>
-    <a:masterClrMapping/>
-  </p:clrMapOvr>
-</p:notes>
-</file>
-
-<file path=ppt/notesSlides/notesSlide4.xml><?xml version="1.0" encoding="utf-8"?>
-<p:notes xmlns:a="http://schemas.openxmlformats.org/drawingml/2006/main" xmlns:p="http://schemas.openxmlformats.org/presentationml/2006/main" xmlns:r="http://schemas.openxmlformats.org/officeDocument/2006/relationships">
-  <p:cSld>
-    <p:spTree>
-      <p:nvGrpSpPr>
-        <p:cNvPr id="1" name=""/>
-        <p:cNvGrpSpPr/>
-        <p:nvPr/>
-      </p:nvGrpSpPr>
-      <p:grpSpPr>
-        <a:xfrm>
-          <a:off x="0" y="0"/>
-          <a:ext cx="0" cy="0"/>
-          <a:chOff x="0" y="0"/>
-          <a:chExt cx="0" cy="0"/>
-        </a:xfrm>
-      </p:grpSpPr>
-      <p:sp>
-        <p:nvSpPr>
-          <p:cNvPr id="2" name="Slide Image Placeholder 1"/>
-          <p:cNvSpPr>
-            <a:spLocks noGrp="1"/>
-          </p:cNvSpPr>
-          <p:nvPr>
-            <p:ph type="sldImg" idx="2"/>
-          </p:nvPr>
-        </p:nvSpPr>
-        <p:spPr/>
-      </p:sp>
-      <p:sp>
-        <p:nvSpPr>
-          <p:cNvPr id="3" name="Notes Placeholder 2"/>
-          <p:cNvSpPr>
-            <a:spLocks noGrp="1"/>
-          </p:cNvSpPr>
-          <p:nvPr>
-            <p:ph type="body" idx="3" sz="quarter"/>
-          </p:nvPr>
-        </p:nvSpPr>
-        <p:spPr/>
-        <p:txBody>
-          <a:bodyPr/>
-          <a:lstStyle/>
-          <a:p>
-            <a:r>
-              <a:t>Dejar unos segundos para que piensen la respuesta fácil antes de enseñar los pasos.</a:t>
-            </a:r>
-          </a:p>
-        </p:txBody>
-      </p:sp>
-      <p:sp>
-        <p:nvSpPr>
-          <p:cNvPr id="4" name="Slide Number Placeholder 3"/>
-          <p:cNvSpPr>
-            <a:spLocks noGrp="1"/>
-          </p:cNvSpPr>
-          <p:nvPr>
-            <p:ph type="sldNum" idx="5" sz="quarter"/>
-          </p:nvPr>
-        </p:nvSpPr>
-        <p:spPr/>
-      </p:sp>
-    </p:spTree>
-  </p:cSld>
-  <p:clrMapOvr>
-    <a:masterClrMapping/>
-  </p:clrMapOvr>
-</p:notes>
-</file>
-
-<file path=ppt/notesSlides/notesSlide5.xml><?xml version="1.0" encoding="utf-8"?>
-<p:notes xmlns:a="http://schemas.openxmlformats.org/drawingml/2006/main" xmlns:p="http://schemas.openxmlformats.org/presentationml/2006/main" xmlns:r="http://schemas.openxmlformats.org/officeDocument/2006/relationships">
-  <p:cSld>
-    <p:spTree>
-      <p:nvGrpSpPr>
-        <p:cNvPr id="1" name=""/>
-        <p:cNvGrpSpPr/>
-        <p:nvPr/>
-      </p:nvGrpSpPr>
-      <p:grpSpPr>
-        <a:xfrm>
-          <a:off x="0" y="0"/>
-          <a:ext cx="0" cy="0"/>
-          <a:chOff x="0" y="0"/>
-          <a:chExt cx="0" cy="0"/>
-        </a:xfrm>
-      </p:grpSpPr>
-      <p:sp>
-        <p:nvSpPr>
-          <p:cNvPr id="2" name="Slide Image Placeholder 1"/>
-          <p:cNvSpPr>
-            <a:spLocks noGrp="1"/>
-          </p:cNvSpPr>
-          <p:nvPr>
-            <p:ph type="sldImg" idx="2"/>
-          </p:nvPr>
-        </p:nvSpPr>
-        <p:spPr/>
-      </p:sp>
-      <p:sp>
-        <p:nvSpPr>
-          <p:cNvPr id="3" name="Notes Placeholder 2"/>
-          <p:cNvSpPr>
-            <a:spLocks noGrp="1"/>
-          </p:cNvSpPr>
-          <p:nvPr>
-            <p:ph type="body" idx="3" sz="quarter"/>
-          </p:nvPr>
-        </p:nvSpPr>
-        <p:spPr/>
-        <p:txBody>
-          <a:bodyPr/>
-          <a:lstStyle/>
-          <a:p>
-            <a:r>
-              <a:t>Dejar 2 minutos para que lo escriban. La diapositiva siguiente muestra el resumen.</a:t>
-            </a:r>
-          </a:p>
-        </p:txBody>
-      </p:sp>
-      <p:sp>
-        <p:nvSpPr>
-          <p:cNvPr id="4" name="Slide Number Placeholder 3"/>
-          <p:cNvSpPr>
-            <a:spLocks noGrp="1"/>
-          </p:cNvSpPr>
-          <p:nvPr>
-            <p:ph type="sldNum" idx="5" sz="quarter"/>
-          </p:nvPr>
-        </p:nvSpPr>
-        <p:spPr/>
-      </p:sp>
-    </p:spTree>
-  </p:cSld>
-  <p:clrMapOvr>
-    <a:masterClrMapping/>
-  </p:clrMapOvr>
-</p:notes>
-</file>
-
-<file path=ppt/notesSlides/notesSlide6.xml><?xml version="1.0" encoding="utf-8"?>
-<p:notes xmlns:a="http://schemas.openxmlformats.org/drawingml/2006/main" xmlns:p="http://schemas.openxmlformats.org/presentationml/2006/main" xmlns:r="http://schemas.openxmlformats.org/officeDocument/2006/relationships">
-  <p:cSld>
-    <p:spTree>
-      <p:nvGrpSpPr>
-        <p:cNvPr id="1" name=""/>
-        <p:cNvGrpSpPr/>
-        <p:nvPr/>
-      </p:nvGrpSpPr>
-      <p:grpSpPr>
-        <a:xfrm>
-          <a:off x="0" y="0"/>
-          <a:ext cx="0" cy="0"/>
-          <a:chOff x="0" y="0"/>
-          <a:chExt cx="0" cy="0"/>
-        </a:xfrm>
-      </p:grpSpPr>
-      <p:sp>
-        <p:nvSpPr>
-          <p:cNvPr id="2" name="Slide Image Placeholder 1"/>
-          <p:cNvSpPr>
-            <a:spLocks noGrp="1"/>
-          </p:cNvSpPr>
-          <p:nvPr>
-            <p:ph type="sldImg" idx="2"/>
-          </p:nvPr>
-        </p:nvSpPr>
-        <p:spPr/>
-      </p:sp>
-      <p:sp>
-        <p:nvSpPr>
-          <p:cNvPr id="3" name="Notes Placeholder 2"/>
-          <p:cNvSpPr>
-            <a:spLocks noGrp="1"/>
-          </p:cNvSpPr>
-          <p:nvPr>
-            <p:ph type="body" idx="3" sz="quarter"/>
-          </p:nvPr>
-        </p:nvSpPr>
-        <p:spPr/>
-        <p:txBody>
-          <a:bodyPr/>
-          <a:lstStyle/>
-          <a:p>
-            <a:r>
-              <a:t>Buscar: «experimento Robbers Cave Sherif» · «experimento cueva de los ladrones explicado»</a:t>
-            </a:r>
-          </a:p>
-        </p:txBody>
-      </p:sp>
-      <p:sp>
-        <p:nvSpPr>
-          <p:cNvPr id="4" name="Slide Number Placeholder 3"/>
-          <p:cNvSpPr>
-            <a:spLocks noGrp="1"/>
-          </p:cNvSpPr>
-          <p:nvPr>
-            <p:ph type="sldNum" idx="5" sz="quarter"/>
-          </p:nvPr>
-        </p:nvSpPr>
-        <p:spPr/>
-      </p:sp>
-    </p:spTree>
-  </p:cSld>
-  <p:clrMapOvr>
-    <a:masterClrMapping/>
-  </p:clrMapOvr>
-</p:notes>
 </file>
 
 <file path=ppt/slideLayouts/slideLayout1.xml><?xml version="1.0" encoding="utf-8"?>

--- a/curso/pptx/S65.pptx
+++ b/curso/pptx/S65.pptx
@@ -4319,7 +4319,7 @@
                 </a:solidFill>
                 <a:latin typeface="Fredoka"/>
               </a:rPr>
-              <a:t>Caso · El equipo de Maialen</a:t>
+              <a:t>Caso · El equipo de una chica</a:t>
             </a:r>
           </a:p>
         </p:txBody>
@@ -4401,7 +4401,7 @@
                 </a:solidFill>
                 <a:latin typeface="Nunito Sans"/>
               </a:rPr>
-              <a:t>En el equipo de balonmano de Maialen se animan mucho en los partidos. Pero en el vestuario hay dos bandos que no se hablan, y la nueva siempre se cambia sola.</a:t>
+              <a:t>En el equipo de balonmano de una chica se animan mucho en los partidos. Pero en el vestuario hay dos bandos que no se hablan, y la nueva siempre se cambia sola. (Variante para semanas con conflicto: En el clan de una chica todos juegan bien juntos, pero hay dos subgrupos que no se hablan en el chat, y al nuevo nadie le contesta.)</a:t>
             </a:r>
           </a:p>
         </p:txBody>
@@ -4710,7 +4710,7 @@
                 </a:solidFill>
                 <a:latin typeface="Nunito Sans"/>
               </a:rPr>
-              <a:t>En la cuadrilla de Iker, cuando hay que elegir plan, cada uno dice lo que piensa y a menudo no están de acuerdo. Luego deciden y siguen quedando.</a:t>
+              <a:t>En la cuadrilla de un chico, cuando hay que elegir plan, cada uno dice lo que piensa y a menudo no están de acuerdo. Luego deciden y siguen quedando.</a:t>
             </a:r>
           </a:p>
         </p:txBody>

--- a/curso/pptx/S65.pptx
+++ b/curso/pptx/S65.pptx
@@ -7458,7 +7458,7 @@
                 </a:solidFill>
                 <a:latin typeface="Nunito Sans"/>
               </a:rPr>
-              <a:t>Callar lo que piensas para no desentonar (la conformidad, sesión 29)</a:t>
+              <a:t>Callar lo que piensas para no desentonar (la conformidad, sesión 10)</a:t>
             </a:r>
           </a:p>
           <a:p>
